--- a/python/ex11/2412747_kadai11.pptx
+++ b/python/ex11/2412747_kadai11.pptx
@@ -6,6 +6,8 @@
   </p:sldMasterIdLst>
   <p:sldIdLst>
     <p:sldId id="257" r:id="rId2"/>
+    <p:sldId id="258" r:id="rId3"/>
+    <p:sldId id="259" r:id="rId4"/>
   </p:sldIdLst>
   <p:sldSz cx="12192000" cy="6858000"/>
   <p:notesSz cx="6858000" cy="9144000"/>
@@ -104,6 +106,11 @@
       </a:defRPr>
     </a:lvl9pPr>
   </p:defaultTextStyle>
+  <p:extLst>
+    <p:ext uri="{EFAFB233-063F-42B5-8137-9DF3F51BA10A}">
+      <p15:sldGuideLst xmlns:p15="http://schemas.microsoft.com/office/powerpoint/2012/main"/>
+    </p:ext>
+  </p:extLst>
 </p:presentation>
 </file>
 
@@ -3652,7 +3659,7 @@
         <p:spPr>
           <a:xfrm>
             <a:off x="838200" y="1690688"/>
-            <a:ext cx="4439036" cy="830997"/>
+            <a:ext cx="10376559" cy="3046988"/>
           </a:xfrm>
           <a:prstGeom prst="rect">
             <a:avLst/>
@@ -3680,7 +3687,61 @@
             <a:endParaRPr lang="en-US" altLang="ja-JP" sz="2400" dirty="0"/>
           </a:p>
           <a:p>
-            <a:endParaRPr kumimoji="1" lang="ja-JP" altLang="en-US" sz="2400"/>
+            <a:r>
+              <a:rPr lang="en-US" altLang="ja-JP" sz="2400" dirty="0"/>
+              <a:t>←</a:t>
+            </a:r>
+            <a:r>
+              <a:rPr lang="ja-JP" altLang="en-US" sz="2400"/>
+              <a:t>これは機械学習で容易に実現できる</a:t>
+            </a:r>
+            <a:endParaRPr lang="en-US" altLang="ja-JP" sz="2400" dirty="0"/>
+          </a:p>
+          <a:p>
+            <a:endParaRPr kumimoji="1" lang="en-US" altLang="ja-JP" sz="2400" dirty="0"/>
+          </a:p>
+          <a:p>
+            <a:r>
+              <a:rPr lang="ja-JP" altLang="en-US" sz="2400"/>
+              <a:t>今回の配布ディレクトリには</a:t>
+            </a:r>
+            <a:r>
+              <a:rPr lang="en-US" altLang="ja-JP" sz="2400" dirty="0"/>
+              <a:t>train</a:t>
+            </a:r>
+            <a:r>
+              <a:rPr lang="ja-JP" altLang="en-US" sz="2400"/>
+              <a:t>データがあるので、それを使用して学習</a:t>
+            </a:r>
+            <a:endParaRPr lang="en-US" altLang="ja-JP" sz="2400" dirty="0"/>
+          </a:p>
+          <a:p>
+            <a:endParaRPr lang="en-US" altLang="ja-JP" sz="2400" dirty="0"/>
+          </a:p>
+          <a:p>
+            <a:r>
+              <a:rPr lang="ja-JP" altLang="en-US" sz="2400"/>
+              <a:t>具体的には、</a:t>
+            </a:r>
+            <a:r>
+              <a:rPr lang="en-US" altLang="ja-JP" sz="2400" dirty="0"/>
+              <a:t>k-</a:t>
+            </a:r>
+            <a:r>
+              <a:rPr lang="ja-JP" altLang="en-US" sz="2400"/>
+              <a:t>近傍法というメソッドを利用</a:t>
+            </a:r>
+            <a:endParaRPr lang="en-US" altLang="ja-JP" sz="2400" dirty="0"/>
+          </a:p>
+          <a:p>
+            <a:endParaRPr lang="en-US" altLang="ja-JP" sz="2400" dirty="0"/>
+          </a:p>
+          <a:p>
+            <a:r>
+              <a:rPr lang="ja-JP" altLang="en-US" sz="2400"/>
+              <a:t>これによってディレクトリ直下のサンプル画像の数字がわかる！</a:t>
+            </a:r>
+            <a:endParaRPr lang="en-US" altLang="ja-JP" sz="2400" dirty="0"/>
           </a:p>
         </p:txBody>
       </p:sp>
@@ -3688,6 +3749,372 @@
     <p:extLst>
       <p:ext uri="{BB962C8B-B14F-4D97-AF65-F5344CB8AC3E}">
         <p14:creationId xmlns:p14="http://schemas.microsoft.com/office/powerpoint/2010/main" val="2329039572"/>
+      </p:ext>
+    </p:extLst>
+  </p:cSld>
+  <p:clrMapOvr>
+    <a:masterClrMapping/>
+  </p:clrMapOvr>
+</p:sld>
+</file>
+
+<file path=ppt/slides/slide2.xml><?xml version="1.0" encoding="utf-8"?>
+<p:sld xmlns:a="http://schemas.openxmlformats.org/drawingml/2006/main" xmlns:r="http://schemas.openxmlformats.org/officeDocument/2006/relationships" xmlns:p="http://schemas.openxmlformats.org/presentationml/2006/main">
+  <p:cSld>
+    <p:spTree>
+      <p:nvGrpSpPr>
+        <p:cNvPr id="1" name=""/>
+        <p:cNvGrpSpPr/>
+        <p:nvPr/>
+      </p:nvGrpSpPr>
+      <p:grpSpPr>
+        <a:xfrm>
+          <a:off x="0" y="0"/>
+          <a:ext cx="0" cy="0"/>
+          <a:chOff x="0" y="0"/>
+          <a:chExt cx="0" cy="0"/>
+        </a:xfrm>
+      </p:grpSpPr>
+      <p:sp>
+        <p:nvSpPr>
+          <p:cNvPr id="2" name="タイトル 1">
+            <a:extLst>
+              <a:ext uri="{FF2B5EF4-FFF2-40B4-BE49-F238E27FC236}">
+                <a16:creationId xmlns:a16="http://schemas.microsoft.com/office/drawing/2014/main" id="{640CD793-981D-F60A-C1C5-96BFD19B7076}"/>
+              </a:ext>
+            </a:extLst>
+          </p:cNvPr>
+          <p:cNvSpPr>
+            <a:spLocks noGrp="1"/>
+          </p:cNvSpPr>
+          <p:nvPr>
+            <p:ph type="title"/>
+          </p:nvPr>
+        </p:nvSpPr>
+        <p:spPr/>
+        <p:txBody>
+          <a:bodyPr/>
+          <a:lstStyle/>
+          <a:p>
+            <a:r>
+              <a:rPr kumimoji="1" lang="ja-JP" altLang="en-US"/>
+              <a:t>学習過程</a:t>
+            </a:r>
+          </a:p>
+        </p:txBody>
+      </p:sp>
+      <p:sp>
+        <p:nvSpPr>
+          <p:cNvPr id="3" name="テキスト ボックス 2">
+            <a:extLst>
+              <a:ext uri="{FF2B5EF4-FFF2-40B4-BE49-F238E27FC236}">
+                <a16:creationId xmlns:a16="http://schemas.microsoft.com/office/drawing/2014/main" id="{7D4929AC-0614-6FC2-4870-309360F4AFA4}"/>
+              </a:ext>
+            </a:extLst>
+          </p:cNvPr>
+          <p:cNvSpPr txBox="1"/>
+          <p:nvPr/>
+        </p:nvSpPr>
+        <p:spPr>
+          <a:xfrm>
+            <a:off x="838200" y="1690688"/>
+            <a:ext cx="10341293" cy="2677656"/>
+          </a:xfrm>
+          <a:prstGeom prst="rect">
+            <a:avLst/>
+          </a:prstGeom>
+          <a:noFill/>
+        </p:spPr>
+        <p:txBody>
+          <a:bodyPr wrap="none" rtlCol="0">
+            <a:spAutoFit/>
+          </a:bodyPr>
+          <a:lstStyle/>
+          <a:p>
+            <a:r>
+              <a:rPr kumimoji="1" lang="ja-JP" altLang="en-US" sz="2400"/>
+              <a:t>学習データはあるので、画像とその画像の数字を学習させたい</a:t>
+            </a:r>
+            <a:endParaRPr kumimoji="1" lang="en-US" altLang="ja-JP" sz="2400" dirty="0"/>
+          </a:p>
+          <a:p>
+            <a:r>
+              <a:rPr lang="en-US" altLang="ja-JP" sz="2400" dirty="0"/>
+              <a:t>→</a:t>
+            </a:r>
+            <a:r>
+              <a:rPr lang="ja-JP" altLang="en-US" sz="2400"/>
+              <a:t>ファイル名が</a:t>
+            </a:r>
+            <a:r>
+              <a:rPr lang="en-US" altLang="ja-JP" sz="2400" dirty="0" err="1"/>
+              <a:t>aaaaaa-numx.png</a:t>
+            </a:r>
+            <a:r>
+              <a:rPr lang="ja-JP" altLang="en-US" sz="2400"/>
+              <a:t>となっているので、</a:t>
+            </a:r>
+            <a:endParaRPr lang="en-US" altLang="ja-JP" sz="2400" dirty="0"/>
+          </a:p>
+          <a:p>
+            <a:r>
+              <a:rPr kumimoji="1" lang="ja-JP" altLang="en-US" sz="2400"/>
+              <a:t>　</a:t>
+            </a:r>
+            <a:r>
+              <a:rPr kumimoji="1" lang="en-US" altLang="ja-JP" sz="2400" dirty="0"/>
+              <a:t>(a</a:t>
+            </a:r>
+            <a:r>
+              <a:rPr kumimoji="1" lang="ja-JP" altLang="en-US" sz="2400"/>
+              <a:t>はファイル名、</a:t>
+            </a:r>
+            <a:r>
+              <a:rPr lang="en-US" altLang="ja-JP" sz="2400" dirty="0"/>
+              <a:t>x</a:t>
+            </a:r>
+            <a:r>
+              <a:rPr lang="ja-JP" altLang="en-US" sz="2400"/>
+              <a:t>は画像の数字名</a:t>
+            </a:r>
+            <a:r>
+              <a:rPr kumimoji="1" lang="en-US" altLang="ja-JP" sz="2400" dirty="0"/>
+              <a:t>)</a:t>
+            </a:r>
+          </a:p>
+          <a:p>
+            <a:r>
+              <a:rPr kumimoji="1" lang="ja-JP" altLang="en-US" sz="2400"/>
+              <a:t>　数字部分を抜き出して画像と対応させれば良い</a:t>
+            </a:r>
+            <a:endParaRPr kumimoji="1" lang="en-US" altLang="ja-JP" sz="2400" dirty="0"/>
+          </a:p>
+          <a:p>
+            <a:endParaRPr lang="en-US" altLang="ja-JP" sz="2400" dirty="0"/>
+          </a:p>
+          <a:p>
+            <a:r>
+              <a:rPr lang="ja-JP" altLang="en-US" sz="2400"/>
+              <a:t>画像サイズを整えて、その画像と数字ラベルを配列に格納して対応させる</a:t>
+            </a:r>
+            <a:endParaRPr lang="en-US" altLang="ja-JP" sz="2400" dirty="0"/>
+          </a:p>
+          <a:p>
+            <a:r>
+              <a:rPr kumimoji="1" lang="en-US" altLang="ja-JP" sz="2400" dirty="0"/>
+              <a:t>→</a:t>
+            </a:r>
+            <a:r>
+              <a:rPr kumimoji="1" lang="ja-JP" altLang="en-US" sz="2400"/>
+              <a:t>これで特徴量データが完成した</a:t>
+            </a:r>
+          </a:p>
+        </p:txBody>
+      </p:sp>
+    </p:spTree>
+    <p:extLst>
+      <p:ext uri="{BB962C8B-B14F-4D97-AF65-F5344CB8AC3E}">
+        <p14:creationId xmlns:p14="http://schemas.microsoft.com/office/powerpoint/2010/main" val="3443052062"/>
+      </p:ext>
+    </p:extLst>
+  </p:cSld>
+  <p:clrMapOvr>
+    <a:masterClrMapping/>
+  </p:clrMapOvr>
+</p:sld>
+</file>
+
+<file path=ppt/slides/slide3.xml><?xml version="1.0" encoding="utf-8"?>
+<p:sld xmlns:a="http://schemas.openxmlformats.org/drawingml/2006/main" xmlns:r="http://schemas.openxmlformats.org/officeDocument/2006/relationships" xmlns:p="http://schemas.openxmlformats.org/presentationml/2006/main">
+  <p:cSld>
+    <p:spTree>
+      <p:nvGrpSpPr>
+        <p:cNvPr id="1" name=""/>
+        <p:cNvGrpSpPr/>
+        <p:nvPr/>
+      </p:nvGrpSpPr>
+      <p:grpSpPr>
+        <a:xfrm>
+          <a:off x="0" y="0"/>
+          <a:ext cx="0" cy="0"/>
+          <a:chOff x="0" y="0"/>
+          <a:chExt cx="0" cy="0"/>
+        </a:xfrm>
+      </p:grpSpPr>
+      <p:sp>
+        <p:nvSpPr>
+          <p:cNvPr id="2" name="タイトル 1">
+            <a:extLst>
+              <a:ext uri="{FF2B5EF4-FFF2-40B4-BE49-F238E27FC236}">
+                <a16:creationId xmlns:a16="http://schemas.microsoft.com/office/drawing/2014/main" id="{5FBE1DE7-8550-FE7E-E6A7-6B962C46F6E7}"/>
+              </a:ext>
+            </a:extLst>
+          </p:cNvPr>
+          <p:cNvSpPr>
+            <a:spLocks noGrp="1"/>
+          </p:cNvSpPr>
+          <p:nvPr>
+            <p:ph type="title"/>
+          </p:nvPr>
+        </p:nvSpPr>
+        <p:spPr/>
+        <p:txBody>
+          <a:bodyPr/>
+          <a:lstStyle/>
+          <a:p>
+            <a:r>
+              <a:rPr lang="en-US" altLang="ja-JP" dirty="0"/>
+              <a:t>k-</a:t>
+            </a:r>
+            <a:r>
+              <a:rPr lang="ja-JP" altLang="en-US"/>
+              <a:t>近傍法</a:t>
+            </a:r>
+            <a:endParaRPr kumimoji="1" lang="ja-JP" altLang="en-US"/>
+          </a:p>
+        </p:txBody>
+      </p:sp>
+      <p:sp>
+        <p:nvSpPr>
+          <p:cNvPr id="3" name="テキスト ボックス 2">
+            <a:extLst>
+              <a:ext uri="{FF2B5EF4-FFF2-40B4-BE49-F238E27FC236}">
+                <a16:creationId xmlns:a16="http://schemas.microsoft.com/office/drawing/2014/main" id="{320935B4-A7CB-CC12-97E3-3DAFF2C89DDE}"/>
+              </a:ext>
+            </a:extLst>
+          </p:cNvPr>
+          <p:cNvSpPr txBox="1"/>
+          <p:nvPr/>
+        </p:nvSpPr>
+        <p:spPr>
+          <a:xfrm>
+            <a:off x="838200" y="1690688"/>
+            <a:ext cx="10649069" cy="4524315"/>
+          </a:xfrm>
+          <a:prstGeom prst="rect">
+            <a:avLst/>
+          </a:prstGeom>
+          <a:noFill/>
+        </p:spPr>
+        <p:txBody>
+          <a:bodyPr wrap="none" rtlCol="0">
+            <a:spAutoFit/>
+          </a:bodyPr>
+          <a:lstStyle/>
+          <a:p>
+            <a:r>
+              <a:rPr kumimoji="1" lang="ja-JP" altLang="en-US" sz="2400"/>
+              <a:t>これはどのような方法なのか？</a:t>
+            </a:r>
+            <a:endParaRPr kumimoji="1" lang="en-US" altLang="ja-JP" sz="2400" dirty="0"/>
+          </a:p>
+          <a:p>
+            <a:r>
+              <a:rPr lang="ja-JP" altLang="en-US" sz="2400"/>
+              <a:t>実のところ、あまり機械学習っぽくない</a:t>
+            </a:r>
+            <a:endParaRPr lang="en-US" altLang="ja-JP" sz="2400" dirty="0"/>
+          </a:p>
+          <a:p>
+            <a:r>
+              <a:rPr kumimoji="1" lang="ja-JP" altLang="en-US" sz="2400"/>
+              <a:t>学習データと検証する画像を比較して、似ているものを採用するという方法</a:t>
+            </a:r>
+            <a:endParaRPr kumimoji="1" lang="en-US" altLang="ja-JP" sz="2400" dirty="0"/>
+          </a:p>
+          <a:p>
+            <a:endParaRPr kumimoji="1" lang="en-US" altLang="ja-JP" sz="2400" dirty="0"/>
+          </a:p>
+          <a:p>
+            <a:r>
+              <a:rPr lang="ja-JP" altLang="en-US" sz="2400"/>
+              <a:t>ただ、一番似ているものだけで判定すると誤判定が起きる</a:t>
+            </a:r>
+            <a:endParaRPr lang="en-US" altLang="ja-JP" sz="2400" dirty="0"/>
+          </a:p>
+          <a:p>
+            <a:r>
+              <a:rPr kumimoji="1" lang="en-US" altLang="ja-JP" sz="2400" dirty="0"/>
+              <a:t>→</a:t>
+            </a:r>
+            <a:r>
+              <a:rPr kumimoji="1" lang="ja-JP" altLang="en-US" sz="2400"/>
+              <a:t>そのため、</a:t>
+            </a:r>
+            <a:r>
+              <a:rPr lang="en-US" altLang="ja-JP" sz="2400" dirty="0"/>
+              <a:t>k</a:t>
+            </a:r>
+            <a:r>
+              <a:rPr lang="ja-JP" altLang="en-US" sz="2400"/>
+              <a:t>の値</a:t>
+            </a:r>
+            <a:r>
+              <a:rPr lang="en-US" altLang="ja-JP" sz="2400" dirty="0"/>
+              <a:t>(</a:t>
+            </a:r>
+            <a:r>
+              <a:rPr lang="ja-JP" altLang="en-US" sz="2400"/>
+              <a:t>判定に使用する画像の枚数</a:t>
+            </a:r>
+            <a:r>
+              <a:rPr lang="en-US" altLang="ja-JP" sz="2400" dirty="0"/>
+              <a:t>)</a:t>
+            </a:r>
+            <a:r>
+              <a:rPr lang="ja-JP" altLang="en-US" sz="2400"/>
+              <a:t>を利用して、その中で一番</a:t>
+            </a:r>
+            <a:endParaRPr lang="en-US" altLang="ja-JP" sz="2400" dirty="0"/>
+          </a:p>
+          <a:p>
+            <a:r>
+              <a:rPr kumimoji="1" lang="ja-JP" altLang="en-US" sz="2400"/>
+              <a:t>　似ているラベルを、その画像の数字とする</a:t>
+            </a:r>
+            <a:endParaRPr kumimoji="1" lang="en-US" altLang="ja-JP" sz="2400" dirty="0"/>
+          </a:p>
+          <a:p>
+            <a:r>
+              <a:rPr lang="ja-JP" altLang="en-US" sz="2400"/>
+              <a:t>これで数字の判別が可能！</a:t>
+            </a:r>
+            <a:endParaRPr kumimoji="1" lang="en-US" altLang="ja-JP" sz="2400" dirty="0"/>
+          </a:p>
+          <a:p>
+            <a:endParaRPr lang="en-US" altLang="ja-JP" sz="2400" dirty="0"/>
+          </a:p>
+          <a:p>
+            <a:r>
+              <a:rPr kumimoji="1" lang="en-US" altLang="ja-JP" sz="2400" dirty="0"/>
+              <a:t>※</a:t>
+            </a:r>
+            <a:r>
+              <a:rPr kumimoji="1" lang="ja-JP" altLang="en-US" sz="2400"/>
+              <a:t>これは非常に単純であるが、全画像との比較による遅延や、</a:t>
+            </a:r>
+            <a:endParaRPr kumimoji="1" lang="en-US" altLang="ja-JP" sz="2400" dirty="0"/>
+          </a:p>
+          <a:p>
+            <a:r>
+              <a:rPr kumimoji="1" lang="ja-JP" altLang="en-US" sz="2400"/>
+              <a:t>画像の形状の変化に</a:t>
+            </a:r>
+            <a:r>
+              <a:rPr lang="ja-JP" altLang="en-US" sz="2400"/>
+              <a:t>弱いというデメリットもある</a:t>
+            </a:r>
+            <a:endParaRPr lang="en-US" altLang="ja-JP" sz="2400" dirty="0"/>
+          </a:p>
+          <a:p>
+            <a:endParaRPr kumimoji="1" lang="en-US" altLang="ja-JP" sz="2400" dirty="0"/>
+          </a:p>
+        </p:txBody>
+      </p:sp>
+    </p:spTree>
+    <p:extLst>
+      <p:ext uri="{BB962C8B-B14F-4D97-AF65-F5344CB8AC3E}">
+        <p14:creationId xmlns:p14="http://schemas.microsoft.com/office/powerpoint/2010/main" val="1101512414"/>
       </p:ext>
     </p:extLst>
   </p:cSld>
